--- a/templates/dynamic/讀經-template.pptx
+++ b/templates/dynamic/讀經-template.pptx
@@ -126,6 +126,133 @@
 <file path=ppt/changesInfos/changesInfo1.xml><?xml version="1.0" encoding="utf-8"?>
 <pc:chgInfo xmlns:a="http://schemas.openxmlformats.org/drawingml/2006/main" xmlns:r="http://schemas.openxmlformats.org/officeDocument/2006/relationships" xmlns:ac="http://schemas.microsoft.com/office/drawing/2013/main/command" xmlns:pc="http://schemas.microsoft.com/office/powerpoint/2013/main/command">
   <pc:docChgLst>
+    <pc:chgData name="Sam Fung" userId="e9dde229f212a63a" providerId="LiveId" clId="{3FBC12C6-C900-496F-9D1D-56899E1D4AAF}"/>
+    <pc:docChg chg="modSld modMainMaster">
+      <pc:chgData name="Sam Fung" userId="e9dde229f212a63a" providerId="LiveId" clId="{3FBC12C6-C900-496F-9D1D-56899E1D4AAF}" dt="2026-09-04T15:38:29.353" v="6" actId="113"/>
+      <pc:docMkLst>
+        <pc:docMk/>
+      </pc:docMkLst>
+      <pc:sldChg chg="modSp mod setBg">
+        <pc:chgData name="Sam Fung" userId="e9dde229f212a63a" providerId="LiveId" clId="{3FBC12C6-C900-496F-9D1D-56899E1D4AAF}" dt="2026-09-04T15:38:29.353" v="6" actId="113"/>
+        <pc:sldMkLst>
+          <pc:docMk/>
+          <pc:sldMk cId="0" sldId="256"/>
+        </pc:sldMkLst>
+        <pc:spChg chg="mod">
+          <ac:chgData name="Sam Fung" userId="e9dde229f212a63a" providerId="LiveId" clId="{3FBC12C6-C900-496F-9D1D-56899E1D4AAF}" dt="2026-09-04T12:36:51.802" v="1" actId="14838"/>
+          <ac:spMkLst>
+            <pc:docMk/>
+            <pc:sldMk cId="0" sldId="256"/>
+            <ac:spMk id="5" creationId="{00000000-0000-0000-0000-000000000000}"/>
+          </ac:spMkLst>
+        </pc:spChg>
+        <pc:spChg chg="mod">
+          <ac:chgData name="Sam Fung" userId="e9dde229f212a63a" providerId="LiveId" clId="{3FBC12C6-C900-496F-9D1D-56899E1D4AAF}" dt="2026-09-04T15:38:29.353" v="6" actId="113"/>
+          <ac:spMkLst>
+            <pc:docMk/>
+            <pc:sldMk cId="0" sldId="256"/>
+            <ac:spMk id="6" creationId="{00000000-0000-0000-0000-000000000000}"/>
+          </ac:spMkLst>
+        </pc:spChg>
+      </pc:sldChg>
+      <pc:sldMasterChg chg="setBg modSldLayout">
+        <pc:chgData name="Sam Fung" userId="e9dde229f212a63a" providerId="LiveId" clId="{3FBC12C6-C900-496F-9D1D-56899E1D4AAF}" dt="2026-09-04T12:37:28.123" v="5"/>
+        <pc:sldMasterMkLst>
+          <pc:docMk/>
+          <pc:sldMasterMk cId="2209977519" sldId="2147483648"/>
+        </pc:sldMasterMkLst>
+        <pc:sldLayoutChg chg="setBg">
+          <pc:chgData name="Sam Fung" userId="e9dde229f212a63a" providerId="LiveId" clId="{3FBC12C6-C900-496F-9D1D-56899E1D4AAF}" dt="2026-09-04T12:37:28.123" v="5"/>
+          <pc:sldLayoutMkLst>
+            <pc:docMk/>
+            <pc:sldMasterMk cId="2209977519" sldId="2147483648"/>
+            <pc:sldLayoutMk cId="3168075583" sldId="2147483649"/>
+          </pc:sldLayoutMkLst>
+        </pc:sldLayoutChg>
+        <pc:sldLayoutChg chg="setBg">
+          <pc:chgData name="Sam Fung" userId="e9dde229f212a63a" providerId="LiveId" clId="{3FBC12C6-C900-496F-9D1D-56899E1D4AAF}" dt="2026-09-04T12:37:28.123" v="5"/>
+          <pc:sldLayoutMkLst>
+            <pc:docMk/>
+            <pc:sldMasterMk cId="2209977519" sldId="2147483648"/>
+            <pc:sldLayoutMk cId="2614314258" sldId="2147483650"/>
+          </pc:sldLayoutMkLst>
+        </pc:sldLayoutChg>
+        <pc:sldLayoutChg chg="setBg">
+          <pc:chgData name="Sam Fung" userId="e9dde229f212a63a" providerId="LiveId" clId="{3FBC12C6-C900-496F-9D1D-56899E1D4AAF}" dt="2026-09-04T12:37:28.123" v="5"/>
+          <pc:sldLayoutMkLst>
+            <pc:docMk/>
+            <pc:sldMasterMk cId="2209977519" sldId="2147483648"/>
+            <pc:sldLayoutMk cId="960648375" sldId="2147483651"/>
+          </pc:sldLayoutMkLst>
+        </pc:sldLayoutChg>
+        <pc:sldLayoutChg chg="setBg">
+          <pc:chgData name="Sam Fung" userId="e9dde229f212a63a" providerId="LiveId" clId="{3FBC12C6-C900-496F-9D1D-56899E1D4AAF}" dt="2026-09-04T12:37:28.123" v="5"/>
+          <pc:sldLayoutMkLst>
+            <pc:docMk/>
+            <pc:sldMasterMk cId="2209977519" sldId="2147483648"/>
+            <pc:sldLayoutMk cId="2782244947" sldId="2147483652"/>
+          </pc:sldLayoutMkLst>
+        </pc:sldLayoutChg>
+        <pc:sldLayoutChg chg="setBg">
+          <pc:chgData name="Sam Fung" userId="e9dde229f212a63a" providerId="LiveId" clId="{3FBC12C6-C900-496F-9D1D-56899E1D4AAF}" dt="2026-09-04T12:37:28.123" v="5"/>
+          <pc:sldLayoutMkLst>
+            <pc:docMk/>
+            <pc:sldMasterMk cId="2209977519" sldId="2147483648"/>
+            <pc:sldLayoutMk cId="990158736" sldId="2147483653"/>
+          </pc:sldLayoutMkLst>
+        </pc:sldLayoutChg>
+        <pc:sldLayoutChg chg="setBg">
+          <pc:chgData name="Sam Fung" userId="e9dde229f212a63a" providerId="LiveId" clId="{3FBC12C6-C900-496F-9D1D-56899E1D4AAF}" dt="2026-09-04T12:37:28.123" v="5"/>
+          <pc:sldLayoutMkLst>
+            <pc:docMk/>
+            <pc:sldMasterMk cId="2209977519" sldId="2147483648"/>
+            <pc:sldLayoutMk cId="727027711" sldId="2147483654"/>
+          </pc:sldLayoutMkLst>
+        </pc:sldLayoutChg>
+        <pc:sldLayoutChg chg="setBg">
+          <pc:chgData name="Sam Fung" userId="e9dde229f212a63a" providerId="LiveId" clId="{3FBC12C6-C900-496F-9D1D-56899E1D4AAF}" dt="2026-09-04T12:37:28.123" v="5"/>
+          <pc:sldLayoutMkLst>
+            <pc:docMk/>
+            <pc:sldMasterMk cId="2209977519" sldId="2147483648"/>
+            <pc:sldLayoutMk cId="1212999818" sldId="2147483655"/>
+          </pc:sldLayoutMkLst>
+        </pc:sldLayoutChg>
+        <pc:sldLayoutChg chg="setBg">
+          <pc:chgData name="Sam Fung" userId="e9dde229f212a63a" providerId="LiveId" clId="{3FBC12C6-C900-496F-9D1D-56899E1D4AAF}" dt="2026-09-04T12:37:28.123" v="5"/>
+          <pc:sldLayoutMkLst>
+            <pc:docMk/>
+            <pc:sldMasterMk cId="2209977519" sldId="2147483648"/>
+            <pc:sldLayoutMk cId="1840726560" sldId="2147483656"/>
+          </pc:sldLayoutMkLst>
+        </pc:sldLayoutChg>
+        <pc:sldLayoutChg chg="setBg">
+          <pc:chgData name="Sam Fung" userId="e9dde229f212a63a" providerId="LiveId" clId="{3FBC12C6-C900-496F-9D1D-56899E1D4AAF}" dt="2026-09-04T12:37:28.123" v="5"/>
+          <pc:sldLayoutMkLst>
+            <pc:docMk/>
+            <pc:sldMasterMk cId="2209977519" sldId="2147483648"/>
+            <pc:sldLayoutMk cId="3889236939" sldId="2147483657"/>
+          </pc:sldLayoutMkLst>
+        </pc:sldLayoutChg>
+        <pc:sldLayoutChg chg="setBg">
+          <pc:chgData name="Sam Fung" userId="e9dde229f212a63a" providerId="LiveId" clId="{3FBC12C6-C900-496F-9D1D-56899E1D4AAF}" dt="2026-09-04T12:37:28.123" v="5"/>
+          <pc:sldLayoutMkLst>
+            <pc:docMk/>
+            <pc:sldMasterMk cId="2209977519" sldId="2147483648"/>
+            <pc:sldLayoutMk cId="2910927964" sldId="2147483658"/>
+          </pc:sldLayoutMkLst>
+        </pc:sldLayoutChg>
+        <pc:sldLayoutChg chg="setBg">
+          <pc:chgData name="Sam Fung" userId="e9dde229f212a63a" providerId="LiveId" clId="{3FBC12C6-C900-496F-9D1D-56899E1D4AAF}" dt="2026-09-04T12:37:28.123" v="5"/>
+          <pc:sldLayoutMkLst>
+            <pc:docMk/>
+            <pc:sldMasterMk cId="2209977519" sldId="2147483648"/>
+            <pc:sldLayoutMk cId="3612223792" sldId="2147483659"/>
+          </pc:sldLayoutMkLst>
+        </pc:sldLayoutChg>
+      </pc:sldMasterChg>
+    </pc:docChg>
+  </pc:docChgLst>
+  <pc:docChgLst>
     <pc:chgData name="Sam Fung" userId="e9dde229f212a63a" providerId="LiveId" clId="{ED4FDC22-1A66-47FC-94B3-C9249CC1211C}"/>
     <pc:docChg chg="modSld">
       <pc:chgData name="Sam Fung" userId="e9dde229f212a63a" providerId="LiveId" clId="{ED4FDC22-1A66-47FC-94B3-C9249CC1211C}" dt="2026-09-02T15:01:45.797" v="7"/>
@@ -323,7 +450,7 @@
           <a:p>
             <a:fld id="{5BCAD085-E8A6-8845-BD4E-CB4CCA059FC4}" type="datetimeFigureOut">
               <a:rPr lang="en-US" smtClean="0"/>
-              <a:t>9/2/2026</a:t>
+              <a:t>9/4/2026</a:t>
             </a:fld>
             <a:endParaRPr lang="en-US"/>
           </a:p>
@@ -491,7 +618,7 @@
           <a:p>
             <a:fld id="{5BCAD085-E8A6-8845-BD4E-CB4CCA059FC4}" type="datetimeFigureOut">
               <a:rPr lang="en-US" smtClean="0"/>
-              <a:t>9/2/2026</a:t>
+              <a:t>9/4/2026</a:t>
             </a:fld>
             <a:endParaRPr lang="en-US"/>
           </a:p>
@@ -669,7 +796,7 @@
           <a:p>
             <a:fld id="{5BCAD085-E8A6-8845-BD4E-CB4CCA059FC4}" type="datetimeFigureOut">
               <a:rPr lang="en-US" smtClean="0"/>
-              <a:t>9/2/2026</a:t>
+              <a:t>9/4/2026</a:t>
             </a:fld>
             <a:endParaRPr lang="en-US"/>
           </a:p>
@@ -837,7 +964,7 @@
           <a:p>
             <a:fld id="{5BCAD085-E8A6-8845-BD4E-CB4CCA059FC4}" type="datetimeFigureOut">
               <a:rPr lang="en-US" smtClean="0"/>
-              <a:t>9/2/2026</a:t>
+              <a:t>9/4/2026</a:t>
             </a:fld>
             <a:endParaRPr lang="en-US"/>
           </a:p>
@@ -1082,7 +1209,7 @@
           <a:p>
             <a:fld id="{5BCAD085-E8A6-8845-BD4E-CB4CCA059FC4}" type="datetimeFigureOut">
               <a:rPr lang="en-US" smtClean="0"/>
-              <a:t>9/2/2026</a:t>
+              <a:t>9/4/2026</a:t>
             </a:fld>
             <a:endParaRPr lang="en-US"/>
           </a:p>
@@ -1367,7 +1494,7 @@
           <a:p>
             <a:fld id="{5BCAD085-E8A6-8845-BD4E-CB4CCA059FC4}" type="datetimeFigureOut">
               <a:rPr lang="en-US" smtClean="0"/>
-              <a:t>9/2/2026</a:t>
+              <a:t>9/4/2026</a:t>
             </a:fld>
             <a:endParaRPr lang="en-US"/>
           </a:p>
@@ -1786,7 +1913,7 @@
           <a:p>
             <a:fld id="{5BCAD085-E8A6-8845-BD4E-CB4CCA059FC4}" type="datetimeFigureOut">
               <a:rPr lang="en-US" smtClean="0"/>
-              <a:t>9/2/2026</a:t>
+              <a:t>9/4/2026</a:t>
             </a:fld>
             <a:endParaRPr lang="en-US"/>
           </a:p>
@@ -1903,7 +2030,7 @@
           <a:p>
             <a:fld id="{5BCAD085-E8A6-8845-BD4E-CB4CCA059FC4}" type="datetimeFigureOut">
               <a:rPr lang="en-US" smtClean="0"/>
-              <a:t>9/2/2026</a:t>
+              <a:t>9/4/2026</a:t>
             </a:fld>
             <a:endParaRPr lang="en-US"/>
           </a:p>
@@ -1998,7 +2125,7 @@
           <a:p>
             <a:fld id="{5BCAD085-E8A6-8845-BD4E-CB4CCA059FC4}" type="datetimeFigureOut">
               <a:rPr lang="en-US" smtClean="0"/>
-              <a:t>9/2/2026</a:t>
+              <a:t>9/4/2026</a:t>
             </a:fld>
             <a:endParaRPr lang="en-US"/>
           </a:p>
@@ -2273,7 +2400,7 @@
           <a:p>
             <a:fld id="{5BCAD085-E8A6-8845-BD4E-CB4CCA059FC4}" type="datetimeFigureOut">
               <a:rPr lang="en-US" smtClean="0"/>
-              <a:t>9/2/2026</a:t>
+              <a:t>9/4/2026</a:t>
             </a:fld>
             <a:endParaRPr lang="en-US"/>
           </a:p>
@@ -2525,7 +2652,7 @@
           <a:p>
             <a:fld id="{5BCAD085-E8A6-8845-BD4E-CB4CCA059FC4}" type="datetimeFigureOut">
               <a:rPr lang="en-US" smtClean="0"/>
-              <a:t>9/2/2026</a:t>
+              <a:t>9/4/2026</a:t>
             </a:fld>
             <a:endParaRPr lang="en-US"/>
           </a:p>
@@ -2590,9 +2717,39 @@
 <p:sldMaster xmlns:a="http://schemas.openxmlformats.org/drawingml/2006/main" xmlns:r="http://schemas.openxmlformats.org/officeDocument/2006/relationships" xmlns:p="http://schemas.openxmlformats.org/presentationml/2006/main">
   <p:cSld>
     <p:bg>
-      <p:bgRef idx="1001">
-        <a:schemeClr val="bg1"/>
-      </p:bgRef>
+      <p:bgPr>
+        <a:gradFill flip="none" rotWithShape="1">
+          <a:gsLst>
+            <a:gs pos="0">
+              <a:schemeClr val="tx2">
+                <a:lumMod val="40000"/>
+                <a:lumOff val="60000"/>
+              </a:schemeClr>
+            </a:gs>
+            <a:gs pos="74000">
+              <a:schemeClr val="accent1">
+                <a:lumMod val="45000"/>
+                <a:lumOff val="55000"/>
+              </a:schemeClr>
+            </a:gs>
+            <a:gs pos="83000">
+              <a:schemeClr val="accent1">
+                <a:lumMod val="45000"/>
+                <a:lumOff val="55000"/>
+              </a:schemeClr>
+            </a:gs>
+            <a:gs pos="100000">
+              <a:schemeClr val="accent1">
+                <a:lumMod val="30000"/>
+                <a:lumOff val="70000"/>
+              </a:schemeClr>
+            </a:gs>
+          </a:gsLst>
+          <a:lin ang="5400000" scaled="1"/>
+          <a:tileRect/>
+        </a:gradFill>
+        <a:effectLst/>
+      </p:bgPr>
     </p:bg>
     <p:spTree>
       <p:nvGrpSpPr>
@@ -2736,7 +2893,7 @@
           <a:p>
             <a:fld id="{5BCAD085-E8A6-8845-BD4E-CB4CCA059FC4}" type="datetimeFigureOut">
               <a:rPr lang="en-US" smtClean="0"/>
-              <a:t>9/2/2026</a:t>
+              <a:t>9/4/2026</a:t>
             </a:fld>
             <a:endParaRPr lang="en-US"/>
           </a:p>
@@ -3097,17 +3254,6 @@
 <file path=ppt/slides/slide1.xml><?xml version="1.0" encoding="utf-8"?>
 <p:sld xmlns:a="http://schemas.openxmlformats.org/drawingml/2006/main" xmlns:r="http://schemas.openxmlformats.org/officeDocument/2006/relationships" xmlns:p="http://schemas.openxmlformats.org/presentationml/2006/main">
   <p:cSld>
-    <p:bg>
-      <p:bgPr>
-        <a:solidFill>
-          <a:schemeClr val="tx2">
-            <a:lumMod val="20000"/>
-            <a:lumOff val="80000"/>
-          </a:schemeClr>
-        </a:solidFill>
-        <a:effectLst/>
-      </p:bgPr>
-    </p:bg>
     <p:spTree>
       <p:nvGrpSpPr>
         <p:cNvPr id="1" name=""/>
@@ -3186,7 +3332,7 @@
               </a:lnSpc>
             </a:pPr>
             <a:r>
-              <a:rPr sz="4000" dirty="0">
+              <a:rPr sz="4000" b="1" dirty="0">
                 <a:solidFill>
                   <a:srgbClr val="121212"/>
                 </a:solidFill>
@@ -3226,8 +3372,15 @@
                 <a:solidFill>
                   <a:srgbClr val="141C23"/>
                 </a:solidFill>
-                <a:latin typeface="+mj-ea"/>
-                <a:ea typeface="+mj-ea"/>
+                <a:effectLst>
+                  <a:outerShdw blurRad="50800" dist="38100" dir="2700000" algn="tl" rotWithShape="0">
+                    <a:prstClr val="black">
+                      <a:alpha val="40000"/>
+                    </a:prstClr>
+                  </a:outerShdw>
+                </a:effectLst>
+                <a:latin typeface="新細明體" panose="02020500000000000000" pitchFamily="18" charset="-120"/>
+                <a:ea typeface="新細明體" panose="02020500000000000000" pitchFamily="18" charset="-120"/>
               </a:rPr>
               <a:t>{{SCRIPTURE_TITLE}}</a:t>
             </a:r>
